--- a/宣道詩/(宣道詩24)我要耶穌.pptx
+++ b/宣道詩/(宣道詩24)我要耶穌.pptx
@@ -10,17 +10,14 @@
     <p:sldId id="265" r:id="rId4"/>
     <p:sldId id="266" r:id="rId5"/>
     <p:sldId id="267" r:id="rId6"/>
-    <p:sldId id="268" r:id="rId7"/>
-    <p:sldId id="269" r:id="rId8"/>
-    <p:sldId id="270" r:id="rId9"/>
-    <p:sldId id="271" r:id="rId10"/>
-    <p:sldId id="272" r:id="rId11"/>
-    <p:sldId id="273" r:id="rId12"/>
-    <p:sldId id="274" r:id="rId13"/>
-    <p:sldId id="275" r:id="rId14"/>
-    <p:sldId id="276" r:id="rId15"/>
-    <p:sldId id="277" r:id="rId16"/>
-    <p:sldId id="278" r:id="rId17"/>
+    <p:sldId id="269" r:id="rId7"/>
+    <p:sldId id="270" r:id="rId8"/>
+    <p:sldId id="271" r:id="rId9"/>
+    <p:sldId id="279" r:id="rId10"/>
+    <p:sldId id="274" r:id="rId11"/>
+    <p:sldId id="275" r:id="rId12"/>
+    <p:sldId id="276" r:id="rId13"/>
+    <p:sldId id="280" r:id="rId14"/>
   </p:sldIdLst>
   <p:sldSz cx="12192000" cy="6858000"/>
   <p:notesSz cx="6858000" cy="9144000"/>
@@ -165,7 +162,7 @@
           <a:lstStyle/>
           <a:p>
             <a:r>
-              <a:rPr lang="en-US" altLang="zh-TW" smtClean="0"/>
+              <a:rPr lang="en-US" altLang="zh-TW"/>
               <a:t>Click to edit Master title style</a:t>
             </a:r>
             <a:endParaRPr lang="zh-TW" altLang="en-US"/>
@@ -284,7 +281,7 @@
           </a:lstStyle>
           <a:p>
             <a:r>
-              <a:rPr lang="en-US" altLang="zh-TW" smtClean="0"/>
+              <a:rPr lang="en-US" altLang="zh-TW"/>
               <a:t>Click to edit Master subtitle style</a:t>
             </a:r>
             <a:endParaRPr lang="zh-TW" altLang="en-US"/>
@@ -308,7 +305,7 @@
           <a:p>
             <a:fld id="{A01079F0-9A10-4680-8E05-B1ED70D41E13}" type="datetimeFigureOut">
               <a:rPr lang="vi-VN" smtClean="0"/>
-              <a:t>17/09/2022</a:t>
+              <a:t>27/07/2024</a:t>
             </a:fld>
             <a:endParaRPr lang="vi-VN"/>
           </a:p>
@@ -402,7 +399,7 @@
           <a:lstStyle/>
           <a:p>
             <a:r>
-              <a:rPr lang="en-US" altLang="zh-TW" smtClean="0"/>
+              <a:rPr lang="en-US" altLang="zh-TW"/>
               <a:t>Click to edit Master title style</a:t>
             </a:r>
             <a:endParaRPr lang="zh-TW" altLang="en-US"/>
@@ -426,35 +423,35 @@
           <a:p>
             <a:pPr lvl="0"/>
             <a:r>
-              <a:rPr lang="en-US" altLang="zh-TW" smtClean="0"/>
+              <a:rPr lang="en-US" altLang="zh-TW"/>
               <a:t>Edit Master text styles</a:t>
             </a:r>
           </a:p>
           <a:p>
             <a:pPr lvl="1"/>
             <a:r>
-              <a:rPr lang="en-US" altLang="zh-TW" smtClean="0"/>
+              <a:rPr lang="en-US" altLang="zh-TW"/>
               <a:t>Second level</a:t>
             </a:r>
           </a:p>
           <a:p>
             <a:pPr lvl="2"/>
             <a:r>
-              <a:rPr lang="en-US" altLang="zh-TW" smtClean="0"/>
+              <a:rPr lang="en-US" altLang="zh-TW"/>
               <a:t>Third level</a:t>
             </a:r>
           </a:p>
           <a:p>
             <a:pPr lvl="3"/>
             <a:r>
-              <a:rPr lang="en-US" altLang="zh-TW" smtClean="0"/>
+              <a:rPr lang="en-US" altLang="zh-TW"/>
               <a:t>Fourth level</a:t>
             </a:r>
           </a:p>
           <a:p>
             <a:pPr lvl="4"/>
             <a:r>
-              <a:rPr lang="en-US" altLang="zh-TW" smtClean="0"/>
+              <a:rPr lang="en-US" altLang="zh-TW"/>
               <a:t>Fifth level</a:t>
             </a:r>
             <a:endParaRPr lang="zh-TW" altLang="en-US"/>
@@ -478,7 +475,7 @@
           <a:p>
             <a:fld id="{A01079F0-9A10-4680-8E05-B1ED70D41E13}" type="datetimeFigureOut">
               <a:rPr lang="vi-VN" smtClean="0"/>
-              <a:t>17/09/2022</a:t>
+              <a:t>27/07/2024</a:t>
             </a:fld>
             <a:endParaRPr lang="vi-VN"/>
           </a:p>
@@ -577,7 +574,7 @@
           <a:lstStyle/>
           <a:p>
             <a:r>
-              <a:rPr lang="en-US" altLang="zh-TW" smtClean="0"/>
+              <a:rPr lang="en-US" altLang="zh-TW"/>
               <a:t>Click to edit Master title style</a:t>
             </a:r>
             <a:endParaRPr lang="zh-TW" altLang="en-US"/>
@@ -606,35 +603,35 @@
           <a:p>
             <a:pPr lvl="0"/>
             <a:r>
-              <a:rPr lang="en-US" altLang="zh-TW" smtClean="0"/>
+              <a:rPr lang="en-US" altLang="zh-TW"/>
               <a:t>Edit Master text styles</a:t>
             </a:r>
           </a:p>
           <a:p>
             <a:pPr lvl="1"/>
             <a:r>
-              <a:rPr lang="en-US" altLang="zh-TW" smtClean="0"/>
+              <a:rPr lang="en-US" altLang="zh-TW"/>
               <a:t>Second level</a:t>
             </a:r>
           </a:p>
           <a:p>
             <a:pPr lvl="2"/>
             <a:r>
-              <a:rPr lang="en-US" altLang="zh-TW" smtClean="0"/>
+              <a:rPr lang="en-US" altLang="zh-TW"/>
               <a:t>Third level</a:t>
             </a:r>
           </a:p>
           <a:p>
             <a:pPr lvl="3"/>
             <a:r>
-              <a:rPr lang="en-US" altLang="zh-TW" smtClean="0"/>
+              <a:rPr lang="en-US" altLang="zh-TW"/>
               <a:t>Fourth level</a:t>
             </a:r>
           </a:p>
           <a:p>
             <a:pPr lvl="4"/>
             <a:r>
-              <a:rPr lang="en-US" altLang="zh-TW" smtClean="0"/>
+              <a:rPr lang="en-US" altLang="zh-TW"/>
               <a:t>Fifth level</a:t>
             </a:r>
             <a:endParaRPr lang="zh-TW" altLang="en-US"/>
@@ -658,7 +655,7 @@
           <a:p>
             <a:fld id="{A01079F0-9A10-4680-8E05-B1ED70D41E13}" type="datetimeFigureOut">
               <a:rPr lang="vi-VN" smtClean="0"/>
-              <a:t>17/09/2022</a:t>
+              <a:t>27/07/2024</a:t>
             </a:fld>
             <a:endParaRPr lang="vi-VN"/>
           </a:p>
@@ -752,7 +749,7 @@
           <a:lstStyle/>
           <a:p>
             <a:r>
-              <a:rPr lang="en-US" altLang="zh-TW" smtClean="0"/>
+              <a:rPr lang="en-US" altLang="zh-TW"/>
               <a:t>Click to edit Master title style</a:t>
             </a:r>
             <a:endParaRPr lang="zh-TW" altLang="en-US"/>
@@ -776,35 +773,35 @@
           <a:p>
             <a:pPr lvl="0"/>
             <a:r>
-              <a:rPr lang="en-US" altLang="zh-TW" smtClean="0"/>
+              <a:rPr lang="en-US" altLang="zh-TW"/>
               <a:t>Edit Master text styles</a:t>
             </a:r>
           </a:p>
           <a:p>
             <a:pPr lvl="1"/>
             <a:r>
-              <a:rPr lang="en-US" altLang="zh-TW" smtClean="0"/>
+              <a:rPr lang="en-US" altLang="zh-TW"/>
               <a:t>Second level</a:t>
             </a:r>
           </a:p>
           <a:p>
             <a:pPr lvl="2"/>
             <a:r>
-              <a:rPr lang="en-US" altLang="zh-TW" smtClean="0"/>
+              <a:rPr lang="en-US" altLang="zh-TW"/>
               <a:t>Third level</a:t>
             </a:r>
           </a:p>
           <a:p>
             <a:pPr lvl="3"/>
             <a:r>
-              <a:rPr lang="en-US" altLang="zh-TW" smtClean="0"/>
+              <a:rPr lang="en-US" altLang="zh-TW"/>
               <a:t>Fourth level</a:t>
             </a:r>
           </a:p>
           <a:p>
             <a:pPr lvl="4"/>
             <a:r>
-              <a:rPr lang="en-US" altLang="zh-TW" smtClean="0"/>
+              <a:rPr lang="en-US" altLang="zh-TW"/>
               <a:t>Fifth level</a:t>
             </a:r>
             <a:endParaRPr lang="zh-TW" altLang="en-US"/>
@@ -828,7 +825,7 @@
           <a:p>
             <a:fld id="{A01079F0-9A10-4680-8E05-B1ED70D41E13}" type="datetimeFigureOut">
               <a:rPr lang="vi-VN" smtClean="0"/>
-              <a:t>17/09/2022</a:t>
+              <a:t>27/07/2024</a:t>
             </a:fld>
             <a:endParaRPr lang="vi-VN"/>
           </a:p>
@@ -931,7 +928,7 @@
           </a:lstStyle>
           <a:p>
             <a:r>
-              <a:rPr lang="en-US" altLang="zh-TW" smtClean="0"/>
+              <a:rPr lang="en-US" altLang="zh-TW"/>
               <a:t>Click to edit Master title style</a:t>
             </a:r>
             <a:endParaRPr lang="zh-TW" altLang="en-US"/>
@@ -1051,7 +1048,7 @@
           <a:p>
             <a:pPr lvl="0"/>
             <a:r>
-              <a:rPr lang="en-US" altLang="zh-TW" smtClean="0"/>
+              <a:rPr lang="en-US" altLang="zh-TW"/>
               <a:t>Edit Master text styles</a:t>
             </a:r>
           </a:p>
@@ -1074,7 +1071,7 @@
           <a:p>
             <a:fld id="{A01079F0-9A10-4680-8E05-B1ED70D41E13}" type="datetimeFigureOut">
               <a:rPr lang="vi-VN" smtClean="0"/>
-              <a:t>17/09/2022</a:t>
+              <a:t>27/07/2024</a:t>
             </a:fld>
             <a:endParaRPr lang="vi-VN"/>
           </a:p>
@@ -1168,7 +1165,7 @@
           <a:lstStyle/>
           <a:p>
             <a:r>
-              <a:rPr lang="en-US" altLang="zh-TW" smtClean="0"/>
+              <a:rPr lang="en-US" altLang="zh-TW"/>
               <a:t>Click to edit Master title style</a:t>
             </a:r>
             <a:endParaRPr lang="zh-TW" altLang="en-US"/>
@@ -1225,35 +1222,35 @@
           <a:p>
             <a:pPr lvl="0"/>
             <a:r>
-              <a:rPr lang="en-US" altLang="zh-TW" smtClean="0"/>
+              <a:rPr lang="en-US" altLang="zh-TW"/>
               <a:t>Edit Master text styles</a:t>
             </a:r>
           </a:p>
           <a:p>
             <a:pPr lvl="1"/>
             <a:r>
-              <a:rPr lang="en-US" altLang="zh-TW" smtClean="0"/>
+              <a:rPr lang="en-US" altLang="zh-TW"/>
               <a:t>Second level</a:t>
             </a:r>
           </a:p>
           <a:p>
             <a:pPr lvl="2"/>
             <a:r>
-              <a:rPr lang="en-US" altLang="zh-TW" smtClean="0"/>
+              <a:rPr lang="en-US" altLang="zh-TW"/>
               <a:t>Third level</a:t>
             </a:r>
           </a:p>
           <a:p>
             <a:pPr lvl="3"/>
             <a:r>
-              <a:rPr lang="en-US" altLang="zh-TW" smtClean="0"/>
+              <a:rPr lang="en-US" altLang="zh-TW"/>
               <a:t>Fourth level</a:t>
             </a:r>
           </a:p>
           <a:p>
             <a:pPr lvl="4"/>
             <a:r>
-              <a:rPr lang="en-US" altLang="zh-TW" smtClean="0"/>
+              <a:rPr lang="en-US" altLang="zh-TW"/>
               <a:t>Fifth level</a:t>
             </a:r>
             <a:endParaRPr lang="zh-TW" altLang="en-US"/>
@@ -1310,35 +1307,35 @@
           <a:p>
             <a:pPr lvl="0"/>
             <a:r>
-              <a:rPr lang="en-US" altLang="zh-TW" smtClean="0"/>
+              <a:rPr lang="en-US" altLang="zh-TW"/>
               <a:t>Edit Master text styles</a:t>
             </a:r>
           </a:p>
           <a:p>
             <a:pPr lvl="1"/>
             <a:r>
-              <a:rPr lang="en-US" altLang="zh-TW" smtClean="0"/>
+              <a:rPr lang="en-US" altLang="zh-TW"/>
               <a:t>Second level</a:t>
             </a:r>
           </a:p>
           <a:p>
             <a:pPr lvl="2"/>
             <a:r>
-              <a:rPr lang="en-US" altLang="zh-TW" smtClean="0"/>
+              <a:rPr lang="en-US" altLang="zh-TW"/>
               <a:t>Third level</a:t>
             </a:r>
           </a:p>
           <a:p>
             <a:pPr lvl="3"/>
             <a:r>
-              <a:rPr lang="en-US" altLang="zh-TW" smtClean="0"/>
+              <a:rPr lang="en-US" altLang="zh-TW"/>
               <a:t>Fourth level</a:t>
             </a:r>
           </a:p>
           <a:p>
             <a:pPr lvl="4"/>
             <a:r>
-              <a:rPr lang="en-US" altLang="zh-TW" smtClean="0"/>
+              <a:rPr lang="en-US" altLang="zh-TW"/>
               <a:t>Fifth level</a:t>
             </a:r>
             <a:endParaRPr lang="zh-TW" altLang="en-US"/>
@@ -1362,7 +1359,7 @@
           <a:p>
             <a:fld id="{A01079F0-9A10-4680-8E05-B1ED70D41E13}" type="datetimeFigureOut">
               <a:rPr lang="vi-VN" smtClean="0"/>
-              <a:t>17/09/2022</a:t>
+              <a:t>27/07/2024</a:t>
             </a:fld>
             <a:endParaRPr lang="vi-VN"/>
           </a:p>
@@ -1460,7 +1457,7 @@
           </a:lstStyle>
           <a:p>
             <a:r>
-              <a:rPr lang="en-US" altLang="zh-TW" smtClean="0"/>
+              <a:rPr lang="en-US" altLang="zh-TW"/>
               <a:t>Click to edit Master title style</a:t>
             </a:r>
             <a:endParaRPr lang="zh-TW" altLang="en-US"/>
@@ -1526,7 +1523,7 @@
           <a:p>
             <a:pPr lvl="0"/>
             <a:r>
-              <a:rPr lang="en-US" altLang="zh-TW" smtClean="0"/>
+              <a:rPr lang="en-US" altLang="zh-TW"/>
               <a:t>Edit Master text styles</a:t>
             </a:r>
           </a:p>
@@ -1582,35 +1579,35 @@
           <a:p>
             <a:pPr lvl="0"/>
             <a:r>
-              <a:rPr lang="en-US" altLang="zh-TW" smtClean="0"/>
+              <a:rPr lang="en-US" altLang="zh-TW"/>
               <a:t>Edit Master text styles</a:t>
             </a:r>
           </a:p>
           <a:p>
             <a:pPr lvl="1"/>
             <a:r>
-              <a:rPr lang="en-US" altLang="zh-TW" smtClean="0"/>
+              <a:rPr lang="en-US" altLang="zh-TW"/>
               <a:t>Second level</a:t>
             </a:r>
           </a:p>
           <a:p>
             <a:pPr lvl="2"/>
             <a:r>
-              <a:rPr lang="en-US" altLang="zh-TW" smtClean="0"/>
+              <a:rPr lang="en-US" altLang="zh-TW"/>
               <a:t>Third level</a:t>
             </a:r>
           </a:p>
           <a:p>
             <a:pPr lvl="3"/>
             <a:r>
-              <a:rPr lang="en-US" altLang="zh-TW" smtClean="0"/>
+              <a:rPr lang="en-US" altLang="zh-TW"/>
               <a:t>Fourth level</a:t>
             </a:r>
           </a:p>
           <a:p>
             <a:pPr lvl="4"/>
             <a:r>
-              <a:rPr lang="en-US" altLang="zh-TW" smtClean="0"/>
+              <a:rPr lang="en-US" altLang="zh-TW"/>
               <a:t>Fifth level</a:t>
             </a:r>
             <a:endParaRPr lang="zh-TW" altLang="en-US"/>
@@ -1676,7 +1673,7 @@
           <a:p>
             <a:pPr lvl="0"/>
             <a:r>
-              <a:rPr lang="en-US" altLang="zh-TW" smtClean="0"/>
+              <a:rPr lang="en-US" altLang="zh-TW"/>
               <a:t>Edit Master text styles</a:t>
             </a:r>
           </a:p>
@@ -1732,35 +1729,35 @@
           <a:p>
             <a:pPr lvl="0"/>
             <a:r>
-              <a:rPr lang="en-US" altLang="zh-TW" smtClean="0"/>
+              <a:rPr lang="en-US" altLang="zh-TW"/>
               <a:t>Edit Master text styles</a:t>
             </a:r>
           </a:p>
           <a:p>
             <a:pPr lvl="1"/>
             <a:r>
-              <a:rPr lang="en-US" altLang="zh-TW" smtClean="0"/>
+              <a:rPr lang="en-US" altLang="zh-TW"/>
               <a:t>Second level</a:t>
             </a:r>
           </a:p>
           <a:p>
             <a:pPr lvl="2"/>
             <a:r>
-              <a:rPr lang="en-US" altLang="zh-TW" smtClean="0"/>
+              <a:rPr lang="en-US" altLang="zh-TW"/>
               <a:t>Third level</a:t>
             </a:r>
           </a:p>
           <a:p>
             <a:pPr lvl="3"/>
             <a:r>
-              <a:rPr lang="en-US" altLang="zh-TW" smtClean="0"/>
+              <a:rPr lang="en-US" altLang="zh-TW"/>
               <a:t>Fourth level</a:t>
             </a:r>
           </a:p>
           <a:p>
             <a:pPr lvl="4"/>
             <a:r>
-              <a:rPr lang="en-US" altLang="zh-TW" smtClean="0"/>
+              <a:rPr lang="en-US" altLang="zh-TW"/>
               <a:t>Fifth level</a:t>
             </a:r>
             <a:endParaRPr lang="zh-TW" altLang="en-US"/>
@@ -1784,7 +1781,7 @@
           <a:p>
             <a:fld id="{A01079F0-9A10-4680-8E05-B1ED70D41E13}" type="datetimeFigureOut">
               <a:rPr lang="vi-VN" smtClean="0"/>
-              <a:t>17/09/2022</a:t>
+              <a:t>27/07/2024</a:t>
             </a:fld>
             <a:endParaRPr lang="vi-VN"/>
           </a:p>
@@ -1878,7 +1875,7 @@
           <a:lstStyle/>
           <a:p>
             <a:r>
-              <a:rPr lang="en-US" altLang="zh-TW" smtClean="0"/>
+              <a:rPr lang="en-US" altLang="zh-TW"/>
               <a:t>Click to edit Master title style</a:t>
             </a:r>
             <a:endParaRPr lang="zh-TW" altLang="en-US"/>
@@ -1902,7 +1899,7 @@
           <a:p>
             <a:fld id="{A01079F0-9A10-4680-8E05-B1ED70D41E13}" type="datetimeFigureOut">
               <a:rPr lang="vi-VN" smtClean="0"/>
-              <a:t>17/09/2022</a:t>
+              <a:t>27/07/2024</a:t>
             </a:fld>
             <a:endParaRPr lang="vi-VN"/>
           </a:p>
@@ -1997,7 +1994,7 @@
           <a:p>
             <a:fld id="{A01079F0-9A10-4680-8E05-B1ED70D41E13}" type="datetimeFigureOut">
               <a:rPr lang="vi-VN" smtClean="0"/>
-              <a:t>17/09/2022</a:t>
+              <a:t>27/07/2024</a:t>
             </a:fld>
             <a:endParaRPr lang="vi-VN"/>
           </a:p>
@@ -2100,7 +2097,7 @@
           </a:lstStyle>
           <a:p>
             <a:r>
-              <a:rPr lang="en-US" altLang="zh-TW" smtClean="0"/>
+              <a:rPr lang="en-US" altLang="zh-TW"/>
               <a:t>Click to edit Master title style</a:t>
             </a:r>
             <a:endParaRPr lang="zh-TW" altLang="en-US"/>
@@ -2157,35 +2154,35 @@
           <a:p>
             <a:pPr lvl="0"/>
             <a:r>
-              <a:rPr lang="en-US" altLang="zh-TW" smtClean="0"/>
+              <a:rPr lang="en-US" altLang="zh-TW"/>
               <a:t>Edit Master text styles</a:t>
             </a:r>
           </a:p>
           <a:p>
             <a:pPr lvl="1"/>
             <a:r>
-              <a:rPr lang="en-US" altLang="zh-TW" smtClean="0"/>
+              <a:rPr lang="en-US" altLang="zh-TW"/>
               <a:t>Second level</a:t>
             </a:r>
           </a:p>
           <a:p>
             <a:pPr lvl="2"/>
             <a:r>
-              <a:rPr lang="en-US" altLang="zh-TW" smtClean="0"/>
+              <a:rPr lang="en-US" altLang="zh-TW"/>
               <a:t>Third level</a:t>
             </a:r>
           </a:p>
           <a:p>
             <a:pPr lvl="3"/>
             <a:r>
-              <a:rPr lang="en-US" altLang="zh-TW" smtClean="0"/>
+              <a:rPr lang="en-US" altLang="zh-TW"/>
               <a:t>Fourth level</a:t>
             </a:r>
           </a:p>
           <a:p>
             <a:pPr lvl="4"/>
             <a:r>
-              <a:rPr lang="en-US" altLang="zh-TW" smtClean="0"/>
+              <a:rPr lang="en-US" altLang="zh-TW"/>
               <a:t>Fifth level</a:t>
             </a:r>
             <a:endParaRPr lang="zh-TW" altLang="en-US"/>
@@ -2251,7 +2248,7 @@
           <a:p>
             <a:pPr lvl="0"/>
             <a:r>
-              <a:rPr lang="en-US" altLang="zh-TW" smtClean="0"/>
+              <a:rPr lang="en-US" altLang="zh-TW"/>
               <a:t>Edit Master text styles</a:t>
             </a:r>
           </a:p>
@@ -2274,7 +2271,7 @@
           <a:p>
             <a:fld id="{A01079F0-9A10-4680-8E05-B1ED70D41E13}" type="datetimeFigureOut">
               <a:rPr lang="vi-VN" smtClean="0"/>
-              <a:t>17/09/2022</a:t>
+              <a:t>27/07/2024</a:t>
             </a:fld>
             <a:endParaRPr lang="vi-VN"/>
           </a:p>
@@ -2377,7 +2374,7 @@
           </a:lstStyle>
           <a:p>
             <a:r>
-              <a:rPr lang="en-US" altLang="zh-TW" smtClean="0"/>
+              <a:rPr lang="en-US" altLang="zh-TW"/>
               <a:t>Click to edit Master title style</a:t>
             </a:r>
             <a:endParaRPr lang="zh-TW" altLang="en-US"/>
@@ -2442,7 +2439,7 @@
           </a:lstStyle>
           <a:p>
             <a:r>
-              <a:rPr lang="en-US" altLang="zh-TW" smtClean="0"/>
+              <a:rPr lang="en-US" altLang="zh-TW"/>
               <a:t>Click icon to add picture</a:t>
             </a:r>
             <a:endParaRPr lang="zh-TW" altLang="en-US"/>
@@ -2508,7 +2505,7 @@
           <a:p>
             <a:pPr lvl="0"/>
             <a:r>
-              <a:rPr lang="en-US" altLang="zh-TW" smtClean="0"/>
+              <a:rPr lang="en-US" altLang="zh-TW"/>
               <a:t>Edit Master text styles</a:t>
             </a:r>
           </a:p>
@@ -2531,7 +2528,7 @@
           <a:p>
             <a:fld id="{A01079F0-9A10-4680-8E05-B1ED70D41E13}" type="datetimeFigureOut">
               <a:rPr lang="vi-VN" smtClean="0"/>
-              <a:t>17/09/2022</a:t>
+              <a:t>27/07/2024</a:t>
             </a:fld>
             <a:endParaRPr lang="vi-VN"/>
           </a:p>
@@ -2645,10 +2642,9 @@
           <a:lstStyle/>
           <a:p>
             <a:r>
-              <a:rPr lang="zh-TW" altLang="en-US" smtClean="0"/>
+              <a:rPr lang="zh-TW" altLang="en-US"/>
               <a:t>按一下以編輯母片標題樣式</a:t>
             </a:r>
-            <a:endParaRPr lang="zh-TW" altLang="en-US"/>
           </a:p>
         </p:txBody>
       </p:sp>
@@ -2679,38 +2675,37 @@
           <a:p>
             <a:pPr lvl="0"/>
             <a:r>
-              <a:rPr lang="zh-TW" altLang="en-US" smtClean="0"/>
+              <a:rPr lang="zh-TW" altLang="en-US"/>
               <a:t>按一下以編輯母片文字樣式</a:t>
             </a:r>
           </a:p>
           <a:p>
             <a:pPr lvl="1"/>
             <a:r>
-              <a:rPr lang="zh-TW" altLang="en-US" smtClean="0"/>
+              <a:rPr lang="zh-TW" altLang="en-US"/>
               <a:t>第二層</a:t>
             </a:r>
           </a:p>
           <a:p>
             <a:pPr lvl="2"/>
             <a:r>
-              <a:rPr lang="zh-TW" altLang="en-US" smtClean="0"/>
+              <a:rPr lang="zh-TW" altLang="en-US"/>
               <a:t>第三層</a:t>
             </a:r>
           </a:p>
           <a:p>
             <a:pPr lvl="3"/>
             <a:r>
-              <a:rPr lang="zh-TW" altLang="en-US" smtClean="0"/>
+              <a:rPr lang="zh-TW" altLang="en-US"/>
               <a:t>第四層</a:t>
             </a:r>
           </a:p>
           <a:p>
             <a:pPr lvl="4"/>
             <a:r>
-              <a:rPr lang="zh-TW" altLang="en-US" smtClean="0"/>
+              <a:rPr lang="zh-TW" altLang="en-US"/>
               <a:t>第五層</a:t>
             </a:r>
-            <a:endParaRPr lang="zh-TW" altLang="en-US"/>
           </a:p>
         </p:txBody>
       </p:sp>
@@ -2749,7 +2744,7 @@
           <a:p>
             <a:fld id="{A01079F0-9A10-4680-8E05-B1ED70D41E13}" type="datetimeFigureOut">
               <a:rPr lang="vi-VN" smtClean="0"/>
-              <a:t>17/09/2022</a:t>
+              <a:t>27/07/2024</a:t>
             </a:fld>
             <a:endParaRPr lang="vi-VN"/>
           </a:p>
@@ -3136,7 +3131,7 @@
         </p:nvSpPr>
         <p:spPr>
           <a:xfrm>
-            <a:off x="0" y="2857513"/>
+            <a:off x="0" y="2658729"/>
             <a:ext cx="12192000" cy="1143000"/>
           </a:xfrm>
         </p:spPr>
@@ -3179,23 +3174,6 @@
                 <a:ea typeface="微軟正黑體" pitchFamily="34" charset="-120"/>
               </a:rPr>
               <a:t>24</a:t>
-            </a:r>
-            <a:r>
-              <a:rPr lang="en-US" altLang="zh-CN" sz="7200" b="1" i="1" dirty="0">
-                <a:solidFill>
-                  <a:srgbClr val="660033"/>
-                </a:solidFill>
-                <a:effectLst>
-                  <a:outerShdw blurRad="38100" dist="38100" dir="2700000" algn="tl">
-                    <a:srgbClr val="000000">
-                      <a:alpha val="43137"/>
-                    </a:srgbClr>
-                  </a:outerShdw>
-                </a:effectLst>
-                <a:latin typeface="微軟正黑體" pitchFamily="34" charset="-120"/>
-                <a:ea typeface="微軟正黑體" pitchFamily="34" charset="-120"/>
-              </a:rPr>
-              <a:t/>
             </a:r>
             <a:br>
               <a:rPr lang="en-US" altLang="zh-CN" sz="7200" b="1" i="1" dirty="0">
@@ -3274,13 +3252,6 @@
   <p:clrMapOvr>
     <a:masterClrMapping/>
   </p:clrMapOvr>
-  <p:timing>
-    <p:tnLst>
-      <p:par>
-        <p:cTn id="1" dur="indefinite" restart="never" nodeType="tmRoot"/>
-      </p:par>
-    </p:tnLst>
-  </p:timing>
 </p:sld>
 </file>
 
@@ -3334,7 +3305,7 @@
                 <a:latin typeface="Microsoft JhengHei" panose="020B0604030504040204" pitchFamily="34" charset="-120"/>
                 <a:ea typeface="Microsoft JhengHei" panose="020B0604030504040204" pitchFamily="34" charset="-120"/>
               </a:rPr>
-              <a:t>光明時日我要祂  </a:t>
+              <a:t>自生至死  我必需要耶穌</a:t>
             </a:r>
             <a:endParaRPr lang="en-US" altLang="zh-CN" sz="6400" b="1" dirty="0">
               <a:solidFill>
@@ -3356,7 +3327,7 @@
                 <a:latin typeface="Microsoft JhengHei" panose="020B0604030504040204" pitchFamily="34" charset="-120"/>
                 <a:ea typeface="Microsoft JhengHei" panose="020B0604030504040204" pitchFamily="34" charset="-120"/>
               </a:rPr>
-              <a:t>黑雲滿佈我要祂</a:t>
+              <a:t>無人像主  他是罪人朋友</a:t>
             </a:r>
             <a:endParaRPr lang="en-US" altLang="zh-CN" sz="6400" b="1" dirty="0">
               <a:solidFill>
@@ -3368,23 +3339,55 @@
           </a:p>
         </p:txBody>
       </p:sp>
+      <p:sp>
+        <p:nvSpPr>
+          <p:cNvPr id="3" name="TextBox 2"/>
+          <p:cNvSpPr txBox="1"/>
+          <p:nvPr/>
+        </p:nvSpPr>
+        <p:spPr>
+          <a:xfrm>
+            <a:off x="0" y="5445224"/>
+            <a:ext cx="12192000" cy="748988"/>
+          </a:xfrm>
+          <a:prstGeom prst="rect">
+            <a:avLst/>
+          </a:prstGeom>
+          <a:noFill/>
+        </p:spPr>
+        <p:txBody>
+          <a:bodyPr wrap="square" rtlCol="0">
+            <a:spAutoFit/>
+          </a:bodyPr>
+          <a:lstStyle/>
+          <a:p>
+            <a:pPr algn="ctr"/>
+            <a:r>
+              <a:rPr lang="en-US" sz="4267" b="1" dirty="0">
+                <a:solidFill>
+                  <a:srgbClr val="660033"/>
+                </a:solidFill>
+              </a:rPr>
+              <a:t>( 3 / 3 )</a:t>
+            </a:r>
+            <a:endParaRPr lang="vi-VN" sz="4267" b="1" dirty="0">
+              <a:solidFill>
+                <a:srgbClr val="660033"/>
+              </a:solidFill>
+            </a:endParaRPr>
+          </a:p>
+        </p:txBody>
+      </p:sp>
     </p:spTree>
     <p:extLst>
       <p:ext uri="{BB962C8B-B14F-4D97-AF65-F5344CB8AC3E}">
-        <p14:creationId xmlns:p14="http://schemas.microsoft.com/office/powerpoint/2010/main" val="479760216"/>
+        <p14:creationId xmlns:p14="http://schemas.microsoft.com/office/powerpoint/2010/main" val="1607923507"/>
       </p:ext>
     </p:extLst>
   </p:cSld>
   <p:clrMapOvr>
     <a:masterClrMapping/>
   </p:clrMapOvr>
-  <p:timing>
-    <p:tnLst>
-      <p:par>
-        <p:cTn id="1" dur="indefinite" restart="never" nodeType="tmRoot"/>
-      </p:par>
-    </p:tnLst>
-  </p:timing>
 </p:sld>
 </file>
 
@@ -3438,7 +3441,7 @@
                 <a:latin typeface="Microsoft JhengHei" panose="020B0604030504040204" pitchFamily="34" charset="-120"/>
                 <a:ea typeface="Microsoft JhengHei" panose="020B0604030504040204" pitchFamily="34" charset="-120"/>
               </a:rPr>
-              <a:t>每日在我生命中  </a:t>
+              <a:t>在急難詩  我更需要耶穌</a:t>
             </a:r>
             <a:endParaRPr lang="en-US" altLang="zh-CN" sz="6400" b="1" dirty="0">
               <a:solidFill>
@@ -3460,7 +3463,7 @@
                 <a:latin typeface="Microsoft JhengHei" panose="020B0604030504040204" pitchFamily="34" charset="-120"/>
                 <a:ea typeface="Microsoft JhengHei" panose="020B0604030504040204" pitchFamily="34" charset="-120"/>
               </a:rPr>
-              <a:t>我要耶穌</a:t>
+              <a:t>全能救主憐憫看顧  我需要耶穌</a:t>
             </a:r>
             <a:endParaRPr lang="en-US" altLang="zh-CN" sz="6400" b="1" dirty="0">
               <a:solidFill>
@@ -3472,23 +3475,55 @@
           </a:p>
         </p:txBody>
       </p:sp>
+      <p:sp>
+        <p:nvSpPr>
+          <p:cNvPr id="3" name="TextBox 2"/>
+          <p:cNvSpPr txBox="1"/>
+          <p:nvPr/>
+        </p:nvSpPr>
+        <p:spPr>
+          <a:xfrm>
+            <a:off x="0" y="5445224"/>
+            <a:ext cx="12192000" cy="748988"/>
+          </a:xfrm>
+          <a:prstGeom prst="rect">
+            <a:avLst/>
+          </a:prstGeom>
+          <a:noFill/>
+        </p:spPr>
+        <p:txBody>
+          <a:bodyPr wrap="square" rtlCol="0">
+            <a:spAutoFit/>
+          </a:bodyPr>
+          <a:lstStyle/>
+          <a:p>
+            <a:pPr algn="ctr"/>
+            <a:r>
+              <a:rPr lang="en-US" sz="4267" b="1" dirty="0">
+                <a:solidFill>
+                  <a:srgbClr val="660033"/>
+                </a:solidFill>
+              </a:rPr>
+              <a:t>( 3 / 3 )</a:t>
+            </a:r>
+            <a:endParaRPr lang="vi-VN" sz="4267" b="1" dirty="0">
+              <a:solidFill>
+                <a:srgbClr val="660033"/>
+              </a:solidFill>
+            </a:endParaRPr>
+          </a:p>
+        </p:txBody>
+      </p:sp>
     </p:spTree>
     <p:extLst>
       <p:ext uri="{BB962C8B-B14F-4D97-AF65-F5344CB8AC3E}">
-        <p14:creationId xmlns:p14="http://schemas.microsoft.com/office/powerpoint/2010/main" val="3420375357"/>
+        <p14:creationId xmlns:p14="http://schemas.microsoft.com/office/powerpoint/2010/main" val="1898851473"/>
       </p:ext>
     </p:extLst>
   </p:cSld>
   <p:clrMapOvr>
     <a:masterClrMapping/>
   </p:clrMapOvr>
-  <p:timing>
-    <p:tnLst>
-      <p:par>
-        <p:cTn id="1" dur="indefinite" restart="never" nodeType="tmRoot"/>
-      </p:par>
-    </p:tnLst>
-  </p:timing>
 </p:sld>
 </file>
 
@@ -3542,7 +3577,7 @@
                 <a:latin typeface="Microsoft JhengHei" panose="020B0604030504040204" pitchFamily="34" charset="-120"/>
                 <a:ea typeface="Microsoft JhengHei" panose="020B0604030504040204" pitchFamily="34" charset="-120"/>
               </a:rPr>
-              <a:t>自生至死  我必需要耶穌</a:t>
+              <a:t>我要耶穌  我要耶穌</a:t>
             </a:r>
             <a:endParaRPr lang="en-US" altLang="zh-CN" sz="6400" b="1" dirty="0">
               <a:solidFill>
@@ -3564,7 +3599,7 @@
                 <a:latin typeface="Microsoft JhengHei" panose="020B0604030504040204" pitchFamily="34" charset="-120"/>
                 <a:ea typeface="Microsoft JhengHei" panose="020B0604030504040204" pitchFamily="34" charset="-120"/>
               </a:rPr>
-              <a:t>無人像主  他是罪人朋友</a:t>
+              <a:t>我每日需要耶穌</a:t>
             </a:r>
             <a:endParaRPr lang="en-US" altLang="zh-CN" sz="6400" b="1" dirty="0">
               <a:solidFill>
@@ -3576,62 +3611,16 @@
           </a:p>
         </p:txBody>
       </p:sp>
-      <p:sp>
-        <p:nvSpPr>
-          <p:cNvPr id="3" name="TextBox 2"/>
-          <p:cNvSpPr txBox="1"/>
-          <p:nvPr/>
-        </p:nvSpPr>
-        <p:spPr>
-          <a:xfrm>
-            <a:off x="0" y="5445224"/>
-            <a:ext cx="12192000" cy="748988"/>
-          </a:xfrm>
-          <a:prstGeom prst="rect">
-            <a:avLst/>
-          </a:prstGeom>
-          <a:noFill/>
-        </p:spPr>
-        <p:txBody>
-          <a:bodyPr wrap="square" rtlCol="0">
-            <a:spAutoFit/>
-          </a:bodyPr>
-          <a:lstStyle/>
-          <a:p>
-            <a:pPr algn="ctr"/>
-            <a:r>
-              <a:rPr lang="en-US" sz="4267" b="1" dirty="0">
-                <a:solidFill>
-                  <a:srgbClr val="660033"/>
-                </a:solidFill>
-              </a:rPr>
-              <a:t>( 3 / 3 )</a:t>
-            </a:r>
-            <a:endParaRPr lang="vi-VN" sz="4267" b="1" dirty="0">
-              <a:solidFill>
-                <a:srgbClr val="660033"/>
-              </a:solidFill>
-            </a:endParaRPr>
-          </a:p>
-        </p:txBody>
-      </p:sp>
     </p:spTree>
     <p:extLst>
       <p:ext uri="{BB962C8B-B14F-4D97-AF65-F5344CB8AC3E}">
-        <p14:creationId xmlns:p14="http://schemas.microsoft.com/office/powerpoint/2010/main" val="1607923507"/>
+        <p14:creationId xmlns:p14="http://schemas.microsoft.com/office/powerpoint/2010/main" val="823870616"/>
       </p:ext>
     </p:extLst>
   </p:cSld>
   <p:clrMapOvr>
     <a:masterClrMapping/>
   </p:clrMapOvr>
-  <p:timing>
-    <p:tnLst>
-      <p:par>
-        <p:cTn id="1" dur="indefinite" restart="never" nodeType="tmRoot"/>
-      </p:par>
-    </p:tnLst>
-  </p:timing>
 </p:sld>
 </file>
 
@@ -3685,7 +3674,7 @@
                 <a:latin typeface="Microsoft JhengHei" panose="020B0604030504040204" pitchFamily="34" charset="-120"/>
                 <a:ea typeface="Microsoft JhengHei" panose="020B0604030504040204" pitchFamily="34" charset="-120"/>
               </a:rPr>
-              <a:t>在急難詩  我更需要耶穌</a:t>
+              <a:t>光明時日我要祂  黑雲滿佈我要祂</a:t>
             </a:r>
             <a:endParaRPr lang="en-US" altLang="zh-CN" sz="6400" b="1" dirty="0">
               <a:solidFill>
@@ -3707,7 +3696,7 @@
                 <a:latin typeface="Microsoft JhengHei" panose="020B0604030504040204" pitchFamily="34" charset="-120"/>
                 <a:ea typeface="Microsoft JhengHei" panose="020B0604030504040204" pitchFamily="34" charset="-120"/>
               </a:rPr>
-              <a:t>全能救主憐憫看顧  我需要耶穌</a:t>
+              <a:t>每日在我生命中  我要耶穌</a:t>
             </a:r>
             <a:endParaRPr lang="en-US" altLang="zh-CN" sz="6400" b="1" dirty="0">
               <a:solidFill>
@@ -3719,390 +3708,16 @@
           </a:p>
         </p:txBody>
       </p:sp>
-      <p:sp>
-        <p:nvSpPr>
-          <p:cNvPr id="3" name="TextBox 2"/>
-          <p:cNvSpPr txBox="1"/>
-          <p:nvPr/>
-        </p:nvSpPr>
-        <p:spPr>
-          <a:xfrm>
-            <a:off x="0" y="5445224"/>
-            <a:ext cx="12192000" cy="748988"/>
-          </a:xfrm>
-          <a:prstGeom prst="rect">
-            <a:avLst/>
-          </a:prstGeom>
-          <a:noFill/>
-        </p:spPr>
-        <p:txBody>
-          <a:bodyPr wrap="square" rtlCol="0">
-            <a:spAutoFit/>
-          </a:bodyPr>
-          <a:lstStyle/>
-          <a:p>
-            <a:pPr algn="ctr"/>
-            <a:r>
-              <a:rPr lang="en-US" sz="4267" b="1" dirty="0">
-                <a:solidFill>
-                  <a:srgbClr val="660033"/>
-                </a:solidFill>
-              </a:rPr>
-              <a:t>( </a:t>
-            </a:r>
-            <a:r>
-              <a:rPr lang="en-US" sz="4267" b="1" dirty="0" smtClean="0">
-                <a:solidFill>
-                  <a:srgbClr val="660033"/>
-                </a:solidFill>
-              </a:rPr>
-              <a:t>3 </a:t>
-            </a:r>
-            <a:r>
-              <a:rPr lang="en-US" sz="4267" b="1" dirty="0">
-                <a:solidFill>
-                  <a:srgbClr val="660033"/>
-                </a:solidFill>
-              </a:rPr>
-              <a:t>/ 3 )</a:t>
-            </a:r>
-            <a:endParaRPr lang="vi-VN" sz="4267" b="1" dirty="0">
-              <a:solidFill>
-                <a:srgbClr val="660033"/>
-              </a:solidFill>
-            </a:endParaRPr>
-          </a:p>
-        </p:txBody>
-      </p:sp>
     </p:spTree>
     <p:extLst>
       <p:ext uri="{BB962C8B-B14F-4D97-AF65-F5344CB8AC3E}">
-        <p14:creationId xmlns:p14="http://schemas.microsoft.com/office/powerpoint/2010/main" val="1898851473"/>
+        <p14:creationId xmlns:p14="http://schemas.microsoft.com/office/powerpoint/2010/main" val="1924442542"/>
       </p:ext>
     </p:extLst>
   </p:cSld>
   <p:clrMapOvr>
     <a:masterClrMapping/>
   </p:clrMapOvr>
-  <p:timing>
-    <p:tnLst>
-      <p:par>
-        <p:cTn id="1" dur="indefinite" restart="never" nodeType="tmRoot"/>
-      </p:par>
-    </p:tnLst>
-  </p:timing>
-</p:sld>
-</file>
-
-<file path=ppt/slides/slide14.xml><?xml version="1.0" encoding="utf-8"?>
-<p:sld xmlns:a="http://schemas.openxmlformats.org/drawingml/2006/main" xmlns:r="http://schemas.openxmlformats.org/officeDocument/2006/relationships" xmlns:p="http://schemas.openxmlformats.org/presentationml/2006/main">
-  <p:cSld>
-    <p:spTree>
-      <p:nvGrpSpPr>
-        <p:cNvPr id="1" name=""/>
-        <p:cNvGrpSpPr/>
-        <p:nvPr/>
-      </p:nvGrpSpPr>
-      <p:grpSpPr>
-        <a:xfrm>
-          <a:off x="0" y="0"/>
-          <a:ext cx="0" cy="0"/>
-          <a:chOff x="0" y="0"/>
-          <a:chExt cx="0" cy="0"/>
-        </a:xfrm>
-      </p:grpSpPr>
-      <p:sp>
-        <p:nvSpPr>
-          <p:cNvPr id="5" name="內容版面配置區 4"/>
-          <p:cNvSpPr>
-            <a:spLocks noGrp="1"/>
-          </p:cNvSpPr>
-          <p:nvPr>
-            <p:ph idx="1"/>
-          </p:nvPr>
-        </p:nvSpPr>
-        <p:spPr>
-          <a:xfrm>
-            <a:off x="0" y="2084851"/>
-            <a:ext cx="12192000" cy="2404863"/>
-          </a:xfrm>
-        </p:spPr>
-        <p:txBody>
-          <a:bodyPr anchor="ctr">
-            <a:normAutofit/>
-          </a:bodyPr>
-          <a:lstStyle/>
-          <a:p>
-            <a:pPr marL="0" indent="0" algn="ctr">
-              <a:buNone/>
-            </a:pPr>
-            <a:r>
-              <a:rPr lang="zh-CN" altLang="en-US" sz="6400" b="1" dirty="0">
-                <a:solidFill>
-                  <a:srgbClr val="660033"/>
-                </a:solidFill>
-                <a:latin typeface="Microsoft JhengHei" panose="020B0604030504040204" pitchFamily="34" charset="-120"/>
-                <a:ea typeface="Microsoft JhengHei" panose="020B0604030504040204" pitchFamily="34" charset="-120"/>
-              </a:rPr>
-              <a:t>我要耶穌  我要耶穌</a:t>
-            </a:r>
-            <a:endParaRPr lang="en-US" altLang="zh-CN" sz="6400" b="1" dirty="0">
-              <a:solidFill>
-                <a:srgbClr val="660033"/>
-              </a:solidFill>
-              <a:latin typeface="Microsoft JhengHei" panose="020B0604030504040204" pitchFamily="34" charset="-120"/>
-              <a:ea typeface="Microsoft JhengHei" panose="020B0604030504040204" pitchFamily="34" charset="-120"/>
-            </a:endParaRPr>
-          </a:p>
-          <a:p>
-            <a:pPr marL="0" indent="0" algn="ctr">
-              <a:buNone/>
-            </a:pPr>
-            <a:r>
-              <a:rPr lang="zh-CN" altLang="en-US" sz="6400" b="1" dirty="0">
-                <a:solidFill>
-                  <a:srgbClr val="660033"/>
-                </a:solidFill>
-                <a:latin typeface="Microsoft JhengHei" panose="020B0604030504040204" pitchFamily="34" charset="-120"/>
-                <a:ea typeface="Microsoft JhengHei" panose="020B0604030504040204" pitchFamily="34" charset="-120"/>
-              </a:rPr>
-              <a:t>我每日需要耶穌</a:t>
-            </a:r>
-            <a:endParaRPr lang="en-US" altLang="zh-CN" sz="6400" b="1" dirty="0">
-              <a:solidFill>
-                <a:srgbClr val="660033"/>
-              </a:solidFill>
-              <a:latin typeface="Microsoft JhengHei" panose="020B0604030504040204" pitchFamily="34" charset="-120"/>
-              <a:ea typeface="Microsoft JhengHei" panose="020B0604030504040204" pitchFamily="34" charset="-120"/>
-            </a:endParaRPr>
-          </a:p>
-        </p:txBody>
-      </p:sp>
-    </p:spTree>
-    <p:extLst>
-      <p:ext uri="{BB962C8B-B14F-4D97-AF65-F5344CB8AC3E}">
-        <p14:creationId xmlns:p14="http://schemas.microsoft.com/office/powerpoint/2010/main" val="823870616"/>
-      </p:ext>
-    </p:extLst>
-  </p:cSld>
-  <p:clrMapOvr>
-    <a:masterClrMapping/>
-  </p:clrMapOvr>
-  <p:timing>
-    <p:tnLst>
-      <p:par>
-        <p:cTn id="1" dur="indefinite" restart="never" nodeType="tmRoot"/>
-      </p:par>
-    </p:tnLst>
-  </p:timing>
-</p:sld>
-</file>
-
-<file path=ppt/slides/slide15.xml><?xml version="1.0" encoding="utf-8"?>
-<p:sld xmlns:a="http://schemas.openxmlformats.org/drawingml/2006/main" xmlns:r="http://schemas.openxmlformats.org/officeDocument/2006/relationships" xmlns:p="http://schemas.openxmlformats.org/presentationml/2006/main">
-  <p:cSld>
-    <p:spTree>
-      <p:nvGrpSpPr>
-        <p:cNvPr id="1" name=""/>
-        <p:cNvGrpSpPr/>
-        <p:nvPr/>
-      </p:nvGrpSpPr>
-      <p:grpSpPr>
-        <a:xfrm>
-          <a:off x="0" y="0"/>
-          <a:ext cx="0" cy="0"/>
-          <a:chOff x="0" y="0"/>
-          <a:chExt cx="0" cy="0"/>
-        </a:xfrm>
-      </p:grpSpPr>
-      <p:sp>
-        <p:nvSpPr>
-          <p:cNvPr id="5" name="內容版面配置區 4"/>
-          <p:cNvSpPr>
-            <a:spLocks noGrp="1"/>
-          </p:cNvSpPr>
-          <p:nvPr>
-            <p:ph idx="1"/>
-          </p:nvPr>
-        </p:nvSpPr>
-        <p:spPr>
-          <a:xfrm>
-            <a:off x="0" y="2084851"/>
-            <a:ext cx="12192000" cy="2404863"/>
-          </a:xfrm>
-        </p:spPr>
-        <p:txBody>
-          <a:bodyPr anchor="ctr">
-            <a:normAutofit/>
-          </a:bodyPr>
-          <a:lstStyle/>
-          <a:p>
-            <a:pPr marL="0" indent="0" algn="ctr">
-              <a:buNone/>
-            </a:pPr>
-            <a:r>
-              <a:rPr lang="zh-CN" altLang="en-US" sz="6400" b="1" dirty="0">
-                <a:solidFill>
-                  <a:srgbClr val="660033"/>
-                </a:solidFill>
-                <a:latin typeface="Microsoft JhengHei" panose="020B0604030504040204" pitchFamily="34" charset="-120"/>
-                <a:ea typeface="Microsoft JhengHei" panose="020B0604030504040204" pitchFamily="34" charset="-120"/>
-              </a:rPr>
-              <a:t>光明時日我要祂  </a:t>
-            </a:r>
-            <a:endParaRPr lang="en-US" altLang="zh-CN" sz="6400" b="1" dirty="0">
-              <a:solidFill>
-                <a:srgbClr val="660033"/>
-              </a:solidFill>
-              <a:latin typeface="Microsoft JhengHei" panose="020B0604030504040204" pitchFamily="34" charset="-120"/>
-              <a:ea typeface="Microsoft JhengHei" panose="020B0604030504040204" pitchFamily="34" charset="-120"/>
-            </a:endParaRPr>
-          </a:p>
-          <a:p>
-            <a:pPr marL="0" indent="0" algn="ctr">
-              <a:buNone/>
-            </a:pPr>
-            <a:r>
-              <a:rPr lang="zh-CN" altLang="en-US" sz="6400" b="1" dirty="0">
-                <a:solidFill>
-                  <a:srgbClr val="660033"/>
-                </a:solidFill>
-                <a:latin typeface="Microsoft JhengHei" panose="020B0604030504040204" pitchFamily="34" charset="-120"/>
-                <a:ea typeface="Microsoft JhengHei" panose="020B0604030504040204" pitchFamily="34" charset="-120"/>
-              </a:rPr>
-              <a:t>黑雲滿佈我要祂</a:t>
-            </a:r>
-            <a:endParaRPr lang="en-US" altLang="zh-CN" sz="6400" b="1" dirty="0">
-              <a:solidFill>
-                <a:srgbClr val="660033"/>
-              </a:solidFill>
-              <a:latin typeface="Microsoft JhengHei" panose="020B0604030504040204" pitchFamily="34" charset="-120"/>
-              <a:ea typeface="Microsoft JhengHei" panose="020B0604030504040204" pitchFamily="34" charset="-120"/>
-            </a:endParaRPr>
-          </a:p>
-        </p:txBody>
-      </p:sp>
-    </p:spTree>
-    <p:extLst>
-      <p:ext uri="{BB962C8B-B14F-4D97-AF65-F5344CB8AC3E}">
-        <p14:creationId xmlns:p14="http://schemas.microsoft.com/office/powerpoint/2010/main" val="1708129865"/>
-      </p:ext>
-    </p:extLst>
-  </p:cSld>
-  <p:clrMapOvr>
-    <a:masterClrMapping/>
-  </p:clrMapOvr>
-  <p:timing>
-    <p:tnLst>
-      <p:par>
-        <p:cTn id="1" dur="indefinite" restart="never" nodeType="tmRoot"/>
-      </p:par>
-    </p:tnLst>
-  </p:timing>
-</p:sld>
-</file>
-
-<file path=ppt/slides/slide16.xml><?xml version="1.0" encoding="utf-8"?>
-<p:sld xmlns:a="http://schemas.openxmlformats.org/drawingml/2006/main" xmlns:r="http://schemas.openxmlformats.org/officeDocument/2006/relationships" xmlns:p="http://schemas.openxmlformats.org/presentationml/2006/main">
-  <p:cSld>
-    <p:spTree>
-      <p:nvGrpSpPr>
-        <p:cNvPr id="1" name=""/>
-        <p:cNvGrpSpPr/>
-        <p:nvPr/>
-      </p:nvGrpSpPr>
-      <p:grpSpPr>
-        <a:xfrm>
-          <a:off x="0" y="0"/>
-          <a:ext cx="0" cy="0"/>
-          <a:chOff x="0" y="0"/>
-          <a:chExt cx="0" cy="0"/>
-        </a:xfrm>
-      </p:grpSpPr>
-      <p:sp>
-        <p:nvSpPr>
-          <p:cNvPr id="5" name="內容版面配置區 4"/>
-          <p:cNvSpPr>
-            <a:spLocks noGrp="1"/>
-          </p:cNvSpPr>
-          <p:nvPr>
-            <p:ph idx="1"/>
-          </p:nvPr>
-        </p:nvSpPr>
-        <p:spPr>
-          <a:xfrm>
-            <a:off x="0" y="2084851"/>
-            <a:ext cx="12192000" cy="2404863"/>
-          </a:xfrm>
-        </p:spPr>
-        <p:txBody>
-          <a:bodyPr anchor="ctr">
-            <a:normAutofit/>
-          </a:bodyPr>
-          <a:lstStyle/>
-          <a:p>
-            <a:pPr marL="0" indent="0" algn="ctr">
-              <a:buNone/>
-            </a:pPr>
-            <a:r>
-              <a:rPr lang="zh-CN" altLang="en-US" sz="6400" b="1" dirty="0">
-                <a:solidFill>
-                  <a:srgbClr val="660033"/>
-                </a:solidFill>
-                <a:latin typeface="Microsoft JhengHei" panose="020B0604030504040204" pitchFamily="34" charset="-120"/>
-                <a:ea typeface="Microsoft JhengHei" panose="020B0604030504040204" pitchFamily="34" charset="-120"/>
-              </a:rPr>
-              <a:t>每日在我生命中  </a:t>
-            </a:r>
-            <a:endParaRPr lang="en-US" altLang="zh-CN" sz="6400" b="1" dirty="0">
-              <a:solidFill>
-                <a:srgbClr val="660033"/>
-              </a:solidFill>
-              <a:latin typeface="Microsoft JhengHei" panose="020B0604030504040204" pitchFamily="34" charset="-120"/>
-              <a:ea typeface="Microsoft JhengHei" panose="020B0604030504040204" pitchFamily="34" charset="-120"/>
-            </a:endParaRPr>
-          </a:p>
-          <a:p>
-            <a:pPr marL="0" indent="0" algn="ctr">
-              <a:buNone/>
-            </a:pPr>
-            <a:r>
-              <a:rPr lang="zh-CN" altLang="en-US" sz="6400" b="1" dirty="0">
-                <a:solidFill>
-                  <a:srgbClr val="660033"/>
-                </a:solidFill>
-                <a:latin typeface="Microsoft JhengHei" panose="020B0604030504040204" pitchFamily="34" charset="-120"/>
-                <a:ea typeface="Microsoft JhengHei" panose="020B0604030504040204" pitchFamily="34" charset="-120"/>
-              </a:rPr>
-              <a:t>我要耶穌</a:t>
-            </a:r>
-            <a:endParaRPr lang="en-US" altLang="zh-CN" sz="6400" b="1" dirty="0">
-              <a:solidFill>
-                <a:srgbClr val="660033"/>
-              </a:solidFill>
-              <a:latin typeface="Microsoft JhengHei" panose="020B0604030504040204" pitchFamily="34" charset="-120"/>
-              <a:ea typeface="Microsoft JhengHei" panose="020B0604030504040204" pitchFamily="34" charset="-120"/>
-            </a:endParaRPr>
-          </a:p>
-        </p:txBody>
-      </p:sp>
-    </p:spTree>
-    <p:extLst>
-      <p:ext uri="{BB962C8B-B14F-4D97-AF65-F5344CB8AC3E}">
-        <p14:creationId xmlns:p14="http://schemas.microsoft.com/office/powerpoint/2010/main" val="2779637785"/>
-      </p:ext>
-    </p:extLst>
-  </p:cSld>
-  <p:clrMapOvr>
-    <a:masterClrMapping/>
-  </p:clrMapOvr>
-  <p:timing>
-    <p:tnLst>
-      <p:par>
-        <p:cTn id="1" dur="indefinite" restart="never" nodeType="tmRoot"/>
-      </p:par>
-    </p:tnLst>
-  </p:timing>
 </p:sld>
 </file>
 
@@ -4219,23 +3834,7 @@
                   <a:srgbClr val="660033"/>
                 </a:solidFill>
               </a:rPr>
-              <a:t>( </a:t>
-            </a:r>
-            <a:r>
-              <a:rPr lang="en-US" sz="4267" b="1" dirty="0" smtClean="0">
-                <a:solidFill>
-                  <a:srgbClr val="660033"/>
-                </a:solidFill>
-              </a:rPr>
-              <a:t>1 / 3 </a:t>
-            </a:r>
-            <a:r>
-              <a:rPr lang="en-US" sz="4267" b="1" dirty="0">
-                <a:solidFill>
-                  <a:srgbClr val="660033"/>
-                </a:solidFill>
-              </a:rPr>
-              <a:t>)</a:t>
+              <a:t>( 1 / 3 )</a:t>
             </a:r>
             <a:endParaRPr lang="vi-VN" sz="4267" b="1" dirty="0">
               <a:solidFill>
@@ -4255,13 +3854,6 @@
   <p:clrMapOvr>
     <a:masterClrMapping/>
   </p:clrMapOvr>
-  <p:timing>
-    <p:tnLst>
-      <p:par>
-        <p:cTn id="1" dur="indefinite" restart="never" nodeType="tmRoot"/>
-      </p:par>
-    </p:tnLst>
-  </p:timing>
 </p:sld>
 </file>
 
@@ -4398,13 +3990,6 @@
   <p:clrMapOvr>
     <a:masterClrMapping/>
   </p:clrMapOvr>
-  <p:timing>
-    <p:tnLst>
-      <p:par>
-        <p:cTn id="1" dur="indefinite" restart="never" nodeType="tmRoot"/>
-      </p:par>
-    </p:tnLst>
-  </p:timing>
 </p:sld>
 </file>
 
@@ -4502,13 +4087,6 @@
   <p:clrMapOvr>
     <a:masterClrMapping/>
   </p:clrMapOvr>
-  <p:timing>
-    <p:tnLst>
-      <p:par>
-        <p:cTn id="1" dur="indefinite" restart="never" nodeType="tmRoot"/>
-      </p:par>
-    </p:tnLst>
-  </p:timing>
 </p:sld>
 </file>
 
@@ -4562,7 +4140,7 @@
                 <a:latin typeface="Microsoft JhengHei" panose="020B0604030504040204" pitchFamily="34" charset="-120"/>
                 <a:ea typeface="Microsoft JhengHei" panose="020B0604030504040204" pitchFamily="34" charset="-120"/>
               </a:rPr>
-              <a:t>光明時日我要祂  </a:t>
+              <a:t>光明時日我要祂  黑雲滿佈我要祂</a:t>
             </a:r>
             <a:endParaRPr lang="en-US" altLang="zh-CN" sz="6400" b="1" dirty="0">
               <a:solidFill>
@@ -4584,7 +4162,7 @@
                 <a:latin typeface="Microsoft JhengHei" panose="020B0604030504040204" pitchFamily="34" charset="-120"/>
                 <a:ea typeface="Microsoft JhengHei" panose="020B0604030504040204" pitchFamily="34" charset="-120"/>
               </a:rPr>
-              <a:t>黑雲滿佈我要祂</a:t>
+              <a:t>每日在我生命中  我要耶穌</a:t>
             </a:r>
             <a:endParaRPr lang="en-US" altLang="zh-CN" sz="6400" b="1" dirty="0">
               <a:solidFill>
@@ -4606,13 +4184,6 @@
   <p:clrMapOvr>
     <a:masterClrMapping/>
   </p:clrMapOvr>
-  <p:timing>
-    <p:tnLst>
-      <p:par>
-        <p:cTn id="1" dur="indefinite" restart="never" nodeType="tmRoot"/>
-      </p:par>
-    </p:tnLst>
-  </p:timing>
 </p:sld>
 </file>
 
@@ -4666,7 +4237,7 @@
                 <a:latin typeface="Microsoft JhengHei" panose="020B0604030504040204" pitchFamily="34" charset="-120"/>
                 <a:ea typeface="Microsoft JhengHei" panose="020B0604030504040204" pitchFamily="34" charset="-120"/>
               </a:rPr>
-              <a:t>每日在我生命中  </a:t>
+              <a:t>我需一友  有力量像耶穌</a:t>
             </a:r>
             <a:endParaRPr lang="en-US" altLang="zh-CN" sz="6400" b="1" dirty="0">
               <a:solidFill>
@@ -4688,7 +4259,7 @@
                 <a:latin typeface="Microsoft JhengHei" panose="020B0604030504040204" pitchFamily="34" charset="-120"/>
                 <a:ea typeface="Microsoft JhengHei" panose="020B0604030504040204" pitchFamily="34" charset="-120"/>
               </a:rPr>
-              <a:t>我要耶穌</a:t>
+              <a:t>在幽暗中  主必引導保護</a:t>
             </a:r>
             <a:endParaRPr lang="en-US" altLang="zh-CN" sz="6400" b="1" dirty="0">
               <a:solidFill>
@@ -4700,23 +4271,55 @@
           </a:p>
         </p:txBody>
       </p:sp>
+      <p:sp>
+        <p:nvSpPr>
+          <p:cNvPr id="3" name="TextBox 2"/>
+          <p:cNvSpPr txBox="1"/>
+          <p:nvPr/>
+        </p:nvSpPr>
+        <p:spPr>
+          <a:xfrm>
+            <a:off x="0" y="5445224"/>
+            <a:ext cx="12192000" cy="748988"/>
+          </a:xfrm>
+          <a:prstGeom prst="rect">
+            <a:avLst/>
+          </a:prstGeom>
+          <a:noFill/>
+        </p:spPr>
+        <p:txBody>
+          <a:bodyPr wrap="square" rtlCol="0">
+            <a:spAutoFit/>
+          </a:bodyPr>
+          <a:lstStyle/>
+          <a:p>
+            <a:pPr algn="ctr"/>
+            <a:r>
+              <a:rPr lang="en-US" sz="4267" b="1" dirty="0">
+                <a:solidFill>
+                  <a:srgbClr val="660033"/>
+                </a:solidFill>
+              </a:rPr>
+              <a:t>( 2 / 3 )</a:t>
+            </a:r>
+            <a:endParaRPr lang="vi-VN" sz="4267" b="1" dirty="0">
+              <a:solidFill>
+                <a:srgbClr val="660033"/>
+              </a:solidFill>
+            </a:endParaRPr>
+          </a:p>
+        </p:txBody>
+      </p:sp>
     </p:spTree>
     <p:extLst>
       <p:ext uri="{BB962C8B-B14F-4D97-AF65-F5344CB8AC3E}">
-        <p14:creationId xmlns:p14="http://schemas.microsoft.com/office/powerpoint/2010/main" val="3363477837"/>
+        <p14:creationId xmlns:p14="http://schemas.microsoft.com/office/powerpoint/2010/main" val="4198946025"/>
       </p:ext>
     </p:extLst>
   </p:cSld>
   <p:clrMapOvr>
     <a:masterClrMapping/>
   </p:clrMapOvr>
-  <p:timing>
-    <p:tnLst>
-      <p:par>
-        <p:cTn id="1" dur="indefinite" restart="never" nodeType="tmRoot"/>
-      </p:par>
-    </p:tnLst>
-  </p:timing>
 </p:sld>
 </file>
 
@@ -4770,7 +4373,7 @@
                 <a:latin typeface="Microsoft JhengHei" panose="020B0604030504040204" pitchFamily="34" charset="-120"/>
                 <a:ea typeface="Microsoft JhengHei" panose="020B0604030504040204" pitchFamily="34" charset="-120"/>
               </a:rPr>
-              <a:t>我需一友  有力量像耶穌</a:t>
+              <a:t>靈慾相攻  惟獨需要耶穌</a:t>
             </a:r>
             <a:endParaRPr lang="en-US" altLang="zh-CN" sz="6400" b="1" dirty="0">
               <a:solidFill>
@@ -4792,7 +4395,7 @@
                 <a:latin typeface="Microsoft JhengHei" panose="020B0604030504040204" pitchFamily="34" charset="-120"/>
                 <a:ea typeface="Microsoft JhengHei" panose="020B0604030504040204" pitchFamily="34" charset="-120"/>
               </a:rPr>
-              <a:t>在幽暗中  主必引導保護</a:t>
+              <a:t>靠己我知必定失敗  故我要耶穌</a:t>
             </a:r>
             <a:endParaRPr lang="en-US" altLang="zh-CN" sz="6400" b="1" dirty="0">
               <a:solidFill>
@@ -4833,23 +4436,7 @@
                   <a:srgbClr val="660033"/>
                 </a:solidFill>
               </a:rPr>
-              <a:t>( </a:t>
-            </a:r>
-            <a:r>
-              <a:rPr lang="en-US" sz="4267" b="1" dirty="0" smtClean="0">
-                <a:solidFill>
-                  <a:srgbClr val="660033"/>
-                </a:solidFill>
-              </a:rPr>
-              <a:t>2 </a:t>
-            </a:r>
-            <a:r>
-              <a:rPr lang="en-US" sz="4267" b="1" dirty="0">
-                <a:solidFill>
-                  <a:srgbClr val="660033"/>
-                </a:solidFill>
-              </a:rPr>
-              <a:t>/ 3 )</a:t>
+              <a:t>( 2 / 3 )</a:t>
             </a:r>
             <a:endParaRPr lang="vi-VN" sz="4267" b="1" dirty="0">
               <a:solidFill>
@@ -4862,20 +4449,13 @@
     </p:spTree>
     <p:extLst>
       <p:ext uri="{BB962C8B-B14F-4D97-AF65-F5344CB8AC3E}">
-        <p14:creationId xmlns:p14="http://schemas.microsoft.com/office/powerpoint/2010/main" val="4198946025"/>
+        <p14:creationId xmlns:p14="http://schemas.microsoft.com/office/powerpoint/2010/main" val="252186525"/>
       </p:ext>
     </p:extLst>
   </p:cSld>
   <p:clrMapOvr>
     <a:masterClrMapping/>
   </p:clrMapOvr>
-  <p:timing>
-    <p:tnLst>
-      <p:par>
-        <p:cTn id="1" dur="indefinite" restart="never" nodeType="tmRoot"/>
-      </p:par>
-    </p:tnLst>
-  </p:timing>
 </p:sld>
 </file>
 
@@ -4929,7 +4509,7 @@
                 <a:latin typeface="Microsoft JhengHei" panose="020B0604030504040204" pitchFamily="34" charset="-120"/>
                 <a:ea typeface="Microsoft JhengHei" panose="020B0604030504040204" pitchFamily="34" charset="-120"/>
               </a:rPr>
-              <a:t>靈慾相攻  惟獨需要耶穌</a:t>
+              <a:t>我要耶穌  我要耶穌</a:t>
             </a:r>
             <a:endParaRPr lang="en-US" altLang="zh-CN" sz="6400" b="1" dirty="0">
               <a:solidFill>
@@ -4951,7 +4531,7 @@
                 <a:latin typeface="Microsoft JhengHei" panose="020B0604030504040204" pitchFamily="34" charset="-120"/>
                 <a:ea typeface="Microsoft JhengHei" panose="020B0604030504040204" pitchFamily="34" charset="-120"/>
               </a:rPr>
-              <a:t>靠己我知必定失敗  故我要耶穌</a:t>
+              <a:t>我每日需要耶穌</a:t>
             </a:r>
             <a:endParaRPr lang="en-US" altLang="zh-CN" sz="6400" b="1" dirty="0">
               <a:solidFill>
@@ -4963,62 +4543,16 @@
           </a:p>
         </p:txBody>
       </p:sp>
-      <p:sp>
-        <p:nvSpPr>
-          <p:cNvPr id="3" name="TextBox 2"/>
-          <p:cNvSpPr txBox="1"/>
-          <p:nvPr/>
-        </p:nvSpPr>
-        <p:spPr>
-          <a:xfrm>
-            <a:off x="0" y="5445224"/>
-            <a:ext cx="12192000" cy="748988"/>
-          </a:xfrm>
-          <a:prstGeom prst="rect">
-            <a:avLst/>
-          </a:prstGeom>
-          <a:noFill/>
-        </p:spPr>
-        <p:txBody>
-          <a:bodyPr wrap="square" rtlCol="0">
-            <a:spAutoFit/>
-          </a:bodyPr>
-          <a:lstStyle/>
-          <a:p>
-            <a:pPr algn="ctr"/>
-            <a:r>
-              <a:rPr lang="en-US" sz="4267" b="1" dirty="0">
-                <a:solidFill>
-                  <a:srgbClr val="660033"/>
-                </a:solidFill>
-              </a:rPr>
-              <a:t>( 2 / 3 )</a:t>
-            </a:r>
-            <a:endParaRPr lang="vi-VN" sz="4267" b="1" dirty="0">
-              <a:solidFill>
-                <a:srgbClr val="660033"/>
-              </a:solidFill>
-            </a:endParaRPr>
-          </a:p>
-        </p:txBody>
-      </p:sp>
     </p:spTree>
     <p:extLst>
       <p:ext uri="{BB962C8B-B14F-4D97-AF65-F5344CB8AC3E}">
-        <p14:creationId xmlns:p14="http://schemas.microsoft.com/office/powerpoint/2010/main" val="252186525"/>
+        <p14:creationId xmlns:p14="http://schemas.microsoft.com/office/powerpoint/2010/main" val="1124183489"/>
       </p:ext>
     </p:extLst>
   </p:cSld>
   <p:clrMapOvr>
     <a:masterClrMapping/>
   </p:clrMapOvr>
-  <p:timing>
-    <p:tnLst>
-      <p:par>
-        <p:cTn id="1" dur="indefinite" restart="never" nodeType="tmRoot"/>
-      </p:par>
-    </p:tnLst>
-  </p:timing>
 </p:sld>
 </file>
 
@@ -5072,7 +4606,7 @@
                 <a:latin typeface="Microsoft JhengHei" panose="020B0604030504040204" pitchFamily="34" charset="-120"/>
                 <a:ea typeface="Microsoft JhengHei" panose="020B0604030504040204" pitchFamily="34" charset="-120"/>
               </a:rPr>
-              <a:t>我要耶穌  我要耶穌</a:t>
+              <a:t>光明時日我要祂  黑雲滿佈我要祂</a:t>
             </a:r>
             <a:endParaRPr lang="en-US" altLang="zh-CN" sz="6400" b="1" dirty="0">
               <a:solidFill>
@@ -5094,7 +4628,7 @@
                 <a:latin typeface="Microsoft JhengHei" panose="020B0604030504040204" pitchFamily="34" charset="-120"/>
                 <a:ea typeface="Microsoft JhengHei" panose="020B0604030504040204" pitchFamily="34" charset="-120"/>
               </a:rPr>
-              <a:t>我每日需要耶穌</a:t>
+              <a:t>每日在我生命中  我要耶穌</a:t>
             </a:r>
             <a:endParaRPr lang="en-US" altLang="zh-CN" sz="6400" b="1" dirty="0">
               <a:solidFill>
@@ -5109,20 +4643,13 @@
     </p:spTree>
     <p:extLst>
       <p:ext uri="{BB962C8B-B14F-4D97-AF65-F5344CB8AC3E}">
-        <p14:creationId xmlns:p14="http://schemas.microsoft.com/office/powerpoint/2010/main" val="1124183489"/>
+        <p14:creationId xmlns:p14="http://schemas.microsoft.com/office/powerpoint/2010/main" val="338801931"/>
       </p:ext>
     </p:extLst>
   </p:cSld>
   <p:clrMapOvr>
     <a:masterClrMapping/>
   </p:clrMapOvr>
-  <p:timing>
-    <p:tnLst>
-      <p:par>
-        <p:cTn id="1" dur="indefinite" restart="never" nodeType="tmRoot"/>
-      </p:par>
-    </p:tnLst>
-  </p:timing>
 </p:sld>
 </file>
 

--- a/宣道詩/(宣道詩24)我要耶穌.pptx
+++ b/宣道詩/(宣道詩24)我要耶穌.pptx
@@ -118,7 +118,7 @@
   </p:defaultTextStyle>
   <p:extLst>
     <p:ext uri="{EFAFB233-063F-42B5-8137-9DF3F51BA10A}">
-      <p15:sldGuideLst xmlns:p15="http://schemas.microsoft.com/office/powerpoint/2012/main"/>
+      <p15:sldGuideLst xmlns:p15="http://schemas.microsoft.com/office/powerpoint/2012/main" xmlns=""/>
     </p:ext>
   </p:extLst>
 </p:presentation>
@@ -305,7 +305,8 @@
           <a:p>
             <a:fld id="{A01079F0-9A10-4680-8E05-B1ED70D41E13}" type="datetimeFigureOut">
               <a:rPr lang="vi-VN" smtClean="0"/>
-              <a:t>27/07/2024</a:t>
+              <a:pPr/>
+              <a:t>28/07/2024</a:t>
             </a:fld>
             <a:endParaRPr lang="vi-VN"/>
           </a:p>
@@ -347,6 +348,7 @@
           <a:p>
             <a:fld id="{2D8B6603-B4D7-43CC-A577-12826235029E}" type="slidenum">
               <a:rPr lang="vi-VN" smtClean="0"/>
+              <a:pPr/>
               <a:t>‹#›</a:t>
             </a:fld>
             <a:endParaRPr lang="vi-VN"/>
@@ -356,7 +358,7 @@
     </p:spTree>
     <p:extLst>
       <p:ext uri="{BB962C8B-B14F-4D97-AF65-F5344CB8AC3E}">
-        <p14:creationId xmlns:p14="http://schemas.microsoft.com/office/powerpoint/2010/main" val="2665604545"/>
+        <p14:creationId xmlns:p14="http://schemas.microsoft.com/office/powerpoint/2010/main" xmlns="" val="2665604545"/>
       </p:ext>
     </p:extLst>
   </p:cSld>
@@ -475,7 +477,8 @@
           <a:p>
             <a:fld id="{A01079F0-9A10-4680-8E05-B1ED70D41E13}" type="datetimeFigureOut">
               <a:rPr lang="vi-VN" smtClean="0"/>
-              <a:t>27/07/2024</a:t>
+              <a:pPr/>
+              <a:t>28/07/2024</a:t>
             </a:fld>
             <a:endParaRPr lang="vi-VN"/>
           </a:p>
@@ -517,6 +520,7 @@
           <a:p>
             <a:fld id="{2D8B6603-B4D7-43CC-A577-12826235029E}" type="slidenum">
               <a:rPr lang="vi-VN" smtClean="0"/>
+              <a:pPr/>
               <a:t>‹#›</a:t>
             </a:fld>
             <a:endParaRPr lang="vi-VN"/>
@@ -526,7 +530,7 @@
     </p:spTree>
     <p:extLst>
       <p:ext uri="{BB962C8B-B14F-4D97-AF65-F5344CB8AC3E}">
-        <p14:creationId xmlns:p14="http://schemas.microsoft.com/office/powerpoint/2010/main" val="2995793655"/>
+        <p14:creationId xmlns:p14="http://schemas.microsoft.com/office/powerpoint/2010/main" xmlns="" val="2995793655"/>
       </p:ext>
     </p:extLst>
   </p:cSld>
@@ -655,7 +659,8 @@
           <a:p>
             <a:fld id="{A01079F0-9A10-4680-8E05-B1ED70D41E13}" type="datetimeFigureOut">
               <a:rPr lang="vi-VN" smtClean="0"/>
-              <a:t>27/07/2024</a:t>
+              <a:pPr/>
+              <a:t>28/07/2024</a:t>
             </a:fld>
             <a:endParaRPr lang="vi-VN"/>
           </a:p>
@@ -697,6 +702,7 @@
           <a:p>
             <a:fld id="{2D8B6603-B4D7-43CC-A577-12826235029E}" type="slidenum">
               <a:rPr lang="vi-VN" smtClean="0"/>
+              <a:pPr/>
               <a:t>‹#›</a:t>
             </a:fld>
             <a:endParaRPr lang="vi-VN"/>
@@ -706,7 +712,7 @@
     </p:spTree>
     <p:extLst>
       <p:ext uri="{BB962C8B-B14F-4D97-AF65-F5344CB8AC3E}">
-        <p14:creationId xmlns:p14="http://schemas.microsoft.com/office/powerpoint/2010/main" val="693803334"/>
+        <p14:creationId xmlns:p14="http://schemas.microsoft.com/office/powerpoint/2010/main" xmlns="" val="693803334"/>
       </p:ext>
     </p:extLst>
   </p:cSld>
@@ -825,7 +831,8 @@
           <a:p>
             <a:fld id="{A01079F0-9A10-4680-8E05-B1ED70D41E13}" type="datetimeFigureOut">
               <a:rPr lang="vi-VN" smtClean="0"/>
-              <a:t>27/07/2024</a:t>
+              <a:pPr/>
+              <a:t>28/07/2024</a:t>
             </a:fld>
             <a:endParaRPr lang="vi-VN"/>
           </a:p>
@@ -867,6 +874,7 @@
           <a:p>
             <a:fld id="{2D8B6603-B4D7-43CC-A577-12826235029E}" type="slidenum">
               <a:rPr lang="vi-VN" smtClean="0"/>
+              <a:pPr/>
               <a:t>‹#›</a:t>
             </a:fld>
             <a:endParaRPr lang="vi-VN"/>
@@ -876,7 +884,7 @@
     </p:spTree>
     <p:extLst>
       <p:ext uri="{BB962C8B-B14F-4D97-AF65-F5344CB8AC3E}">
-        <p14:creationId xmlns:p14="http://schemas.microsoft.com/office/powerpoint/2010/main" val="459590907"/>
+        <p14:creationId xmlns:p14="http://schemas.microsoft.com/office/powerpoint/2010/main" xmlns="" val="459590907"/>
       </p:ext>
     </p:extLst>
   </p:cSld>
@@ -1071,7 +1079,8 @@
           <a:p>
             <a:fld id="{A01079F0-9A10-4680-8E05-B1ED70D41E13}" type="datetimeFigureOut">
               <a:rPr lang="vi-VN" smtClean="0"/>
-              <a:t>27/07/2024</a:t>
+              <a:pPr/>
+              <a:t>28/07/2024</a:t>
             </a:fld>
             <a:endParaRPr lang="vi-VN"/>
           </a:p>
@@ -1113,6 +1122,7 @@
           <a:p>
             <a:fld id="{2D8B6603-B4D7-43CC-A577-12826235029E}" type="slidenum">
               <a:rPr lang="vi-VN" smtClean="0"/>
+              <a:pPr/>
               <a:t>‹#›</a:t>
             </a:fld>
             <a:endParaRPr lang="vi-VN"/>
@@ -1122,7 +1132,7 @@
     </p:spTree>
     <p:extLst>
       <p:ext uri="{BB962C8B-B14F-4D97-AF65-F5344CB8AC3E}">
-        <p14:creationId xmlns:p14="http://schemas.microsoft.com/office/powerpoint/2010/main" val="2886925233"/>
+        <p14:creationId xmlns:p14="http://schemas.microsoft.com/office/powerpoint/2010/main" xmlns="" val="2886925233"/>
       </p:ext>
     </p:extLst>
   </p:cSld>
@@ -1359,7 +1369,8 @@
           <a:p>
             <a:fld id="{A01079F0-9A10-4680-8E05-B1ED70D41E13}" type="datetimeFigureOut">
               <a:rPr lang="vi-VN" smtClean="0"/>
-              <a:t>27/07/2024</a:t>
+              <a:pPr/>
+              <a:t>28/07/2024</a:t>
             </a:fld>
             <a:endParaRPr lang="vi-VN"/>
           </a:p>
@@ -1401,6 +1412,7 @@
           <a:p>
             <a:fld id="{2D8B6603-B4D7-43CC-A577-12826235029E}" type="slidenum">
               <a:rPr lang="vi-VN" smtClean="0"/>
+              <a:pPr/>
               <a:t>‹#›</a:t>
             </a:fld>
             <a:endParaRPr lang="vi-VN"/>
@@ -1410,7 +1422,7 @@
     </p:spTree>
     <p:extLst>
       <p:ext uri="{BB962C8B-B14F-4D97-AF65-F5344CB8AC3E}">
-        <p14:creationId xmlns:p14="http://schemas.microsoft.com/office/powerpoint/2010/main" val="212511807"/>
+        <p14:creationId xmlns:p14="http://schemas.microsoft.com/office/powerpoint/2010/main" xmlns="" val="212511807"/>
       </p:ext>
     </p:extLst>
   </p:cSld>
@@ -1781,7 +1793,8 @@
           <a:p>
             <a:fld id="{A01079F0-9A10-4680-8E05-B1ED70D41E13}" type="datetimeFigureOut">
               <a:rPr lang="vi-VN" smtClean="0"/>
-              <a:t>27/07/2024</a:t>
+              <a:pPr/>
+              <a:t>28/07/2024</a:t>
             </a:fld>
             <a:endParaRPr lang="vi-VN"/>
           </a:p>
@@ -1823,6 +1836,7 @@
           <a:p>
             <a:fld id="{2D8B6603-B4D7-43CC-A577-12826235029E}" type="slidenum">
               <a:rPr lang="vi-VN" smtClean="0"/>
+              <a:pPr/>
               <a:t>‹#›</a:t>
             </a:fld>
             <a:endParaRPr lang="vi-VN"/>
@@ -1832,7 +1846,7 @@
     </p:spTree>
     <p:extLst>
       <p:ext uri="{BB962C8B-B14F-4D97-AF65-F5344CB8AC3E}">
-        <p14:creationId xmlns:p14="http://schemas.microsoft.com/office/powerpoint/2010/main" val="1442166102"/>
+        <p14:creationId xmlns:p14="http://schemas.microsoft.com/office/powerpoint/2010/main" xmlns="" val="1442166102"/>
       </p:ext>
     </p:extLst>
   </p:cSld>
@@ -1899,7 +1913,8 @@
           <a:p>
             <a:fld id="{A01079F0-9A10-4680-8E05-B1ED70D41E13}" type="datetimeFigureOut">
               <a:rPr lang="vi-VN" smtClean="0"/>
-              <a:t>27/07/2024</a:t>
+              <a:pPr/>
+              <a:t>28/07/2024</a:t>
             </a:fld>
             <a:endParaRPr lang="vi-VN"/>
           </a:p>
@@ -1941,6 +1956,7 @@
           <a:p>
             <a:fld id="{2D8B6603-B4D7-43CC-A577-12826235029E}" type="slidenum">
               <a:rPr lang="vi-VN" smtClean="0"/>
+              <a:pPr/>
               <a:t>‹#›</a:t>
             </a:fld>
             <a:endParaRPr lang="vi-VN"/>
@@ -1950,7 +1966,7 @@
     </p:spTree>
     <p:extLst>
       <p:ext uri="{BB962C8B-B14F-4D97-AF65-F5344CB8AC3E}">
-        <p14:creationId xmlns:p14="http://schemas.microsoft.com/office/powerpoint/2010/main" val="2635862087"/>
+        <p14:creationId xmlns:p14="http://schemas.microsoft.com/office/powerpoint/2010/main" xmlns="" val="2635862087"/>
       </p:ext>
     </p:extLst>
   </p:cSld>
@@ -1994,7 +2010,8 @@
           <a:p>
             <a:fld id="{A01079F0-9A10-4680-8E05-B1ED70D41E13}" type="datetimeFigureOut">
               <a:rPr lang="vi-VN" smtClean="0"/>
-              <a:t>27/07/2024</a:t>
+              <a:pPr/>
+              <a:t>28/07/2024</a:t>
             </a:fld>
             <a:endParaRPr lang="vi-VN"/>
           </a:p>
@@ -2036,6 +2053,7 @@
           <a:p>
             <a:fld id="{2D8B6603-B4D7-43CC-A577-12826235029E}" type="slidenum">
               <a:rPr lang="vi-VN" smtClean="0"/>
+              <a:pPr/>
               <a:t>‹#›</a:t>
             </a:fld>
             <a:endParaRPr lang="vi-VN"/>
@@ -2045,7 +2063,7 @@
     </p:spTree>
     <p:extLst>
       <p:ext uri="{BB962C8B-B14F-4D97-AF65-F5344CB8AC3E}">
-        <p14:creationId xmlns:p14="http://schemas.microsoft.com/office/powerpoint/2010/main" val="285493166"/>
+        <p14:creationId xmlns:p14="http://schemas.microsoft.com/office/powerpoint/2010/main" xmlns="" val="285493166"/>
       </p:ext>
     </p:extLst>
   </p:cSld>
@@ -2271,7 +2289,8 @@
           <a:p>
             <a:fld id="{A01079F0-9A10-4680-8E05-B1ED70D41E13}" type="datetimeFigureOut">
               <a:rPr lang="vi-VN" smtClean="0"/>
-              <a:t>27/07/2024</a:t>
+              <a:pPr/>
+              <a:t>28/07/2024</a:t>
             </a:fld>
             <a:endParaRPr lang="vi-VN"/>
           </a:p>
@@ -2313,6 +2332,7 @@
           <a:p>
             <a:fld id="{2D8B6603-B4D7-43CC-A577-12826235029E}" type="slidenum">
               <a:rPr lang="vi-VN" smtClean="0"/>
+              <a:pPr/>
               <a:t>‹#›</a:t>
             </a:fld>
             <a:endParaRPr lang="vi-VN"/>
@@ -2322,7 +2342,7 @@
     </p:spTree>
     <p:extLst>
       <p:ext uri="{BB962C8B-B14F-4D97-AF65-F5344CB8AC3E}">
-        <p14:creationId xmlns:p14="http://schemas.microsoft.com/office/powerpoint/2010/main" val="1192900513"/>
+        <p14:creationId xmlns:p14="http://schemas.microsoft.com/office/powerpoint/2010/main" xmlns="" val="1192900513"/>
       </p:ext>
     </p:extLst>
   </p:cSld>
@@ -2528,7 +2548,8 @@
           <a:p>
             <a:fld id="{A01079F0-9A10-4680-8E05-B1ED70D41E13}" type="datetimeFigureOut">
               <a:rPr lang="vi-VN" smtClean="0"/>
-              <a:t>27/07/2024</a:t>
+              <a:pPr/>
+              <a:t>28/07/2024</a:t>
             </a:fld>
             <a:endParaRPr lang="vi-VN"/>
           </a:p>
@@ -2570,6 +2591,7 @@
           <a:p>
             <a:fld id="{2D8B6603-B4D7-43CC-A577-12826235029E}" type="slidenum">
               <a:rPr lang="vi-VN" smtClean="0"/>
+              <a:pPr/>
               <a:t>‹#›</a:t>
             </a:fld>
             <a:endParaRPr lang="vi-VN"/>
@@ -2579,7 +2601,7 @@
     </p:spTree>
     <p:extLst>
       <p:ext uri="{BB962C8B-B14F-4D97-AF65-F5344CB8AC3E}">
-        <p14:creationId xmlns:p14="http://schemas.microsoft.com/office/powerpoint/2010/main" val="61770658"/>
+        <p14:creationId xmlns:p14="http://schemas.microsoft.com/office/powerpoint/2010/main" xmlns="" val="61770658"/>
       </p:ext>
     </p:extLst>
   </p:cSld>
@@ -2744,7 +2766,8 @@
           <a:p>
             <a:fld id="{A01079F0-9A10-4680-8E05-B1ED70D41E13}" type="datetimeFigureOut">
               <a:rPr lang="vi-VN" smtClean="0"/>
-              <a:t>27/07/2024</a:t>
+              <a:pPr/>
+              <a:t>28/07/2024</a:t>
             </a:fld>
             <a:endParaRPr lang="vi-VN"/>
           </a:p>
@@ -2822,6 +2845,7 @@
           <a:p>
             <a:fld id="{2D8B6603-B4D7-43CC-A577-12826235029E}" type="slidenum">
               <a:rPr lang="vi-VN" smtClean="0"/>
+              <a:pPr/>
               <a:t>‹#›</a:t>
             </a:fld>
             <a:endParaRPr lang="vi-VN"/>
@@ -2831,7 +2855,7 @@
     </p:spTree>
     <p:extLst>
       <p:ext uri="{BB962C8B-B14F-4D97-AF65-F5344CB8AC3E}">
-        <p14:creationId xmlns:p14="http://schemas.microsoft.com/office/powerpoint/2010/main" val="2675674681"/>
+        <p14:creationId xmlns:p14="http://schemas.microsoft.com/office/powerpoint/2010/main" xmlns="" val="2675674681"/>
       </p:ext>
     </p:extLst>
   </p:cSld>
@@ -3175,6 +3199,23 @@
               </a:rPr>
               <a:t>24</a:t>
             </a:r>
+            <a:r>
+              <a:rPr lang="en-US" altLang="zh-CN" sz="7200" b="1" i="1" dirty="0">
+                <a:solidFill>
+                  <a:srgbClr val="660033"/>
+                </a:solidFill>
+                <a:effectLst>
+                  <a:outerShdw blurRad="38100" dist="38100" dir="2700000" algn="tl">
+                    <a:srgbClr val="000000">
+                      <a:alpha val="43137"/>
+                    </a:srgbClr>
+                  </a:outerShdw>
+                </a:effectLst>
+                <a:latin typeface="微軟正黑體" pitchFamily="34" charset="-120"/>
+                <a:ea typeface="微軟正黑體" pitchFamily="34" charset="-120"/>
+              </a:rPr>
+              <a:t/>
+            </a:r>
             <a:br>
               <a:rPr lang="en-US" altLang="zh-CN" sz="7200" b="1" i="1" dirty="0">
                 <a:solidFill>
@@ -3245,7 +3286,7 @@
     </p:spTree>
     <p:extLst>
       <p:ext uri="{BB962C8B-B14F-4D97-AF65-F5344CB8AC3E}">
-        <p14:creationId xmlns:p14="http://schemas.microsoft.com/office/powerpoint/2010/main" val="2148108630"/>
+        <p14:creationId xmlns:p14="http://schemas.microsoft.com/office/powerpoint/2010/main" xmlns="" val="2148108630"/>
       </p:ext>
     </p:extLst>
   </p:cSld>
@@ -3381,7 +3422,7 @@
     </p:spTree>
     <p:extLst>
       <p:ext uri="{BB962C8B-B14F-4D97-AF65-F5344CB8AC3E}">
-        <p14:creationId xmlns:p14="http://schemas.microsoft.com/office/powerpoint/2010/main" val="1607923507"/>
+        <p14:creationId xmlns:p14="http://schemas.microsoft.com/office/powerpoint/2010/main" xmlns="" val="1607923507"/>
       </p:ext>
     </p:extLst>
   </p:cSld>
@@ -3434,14 +3475,34 @@
               <a:buNone/>
             </a:pPr>
             <a:r>
-              <a:rPr lang="zh-CN" altLang="en-US" sz="6400" b="1" dirty="0">
+              <a:rPr lang="zh-CN" altLang="en-US" sz="6400" b="1">
                 <a:solidFill>
                   <a:srgbClr val="660033"/>
                 </a:solidFill>
                 <a:latin typeface="Microsoft JhengHei" panose="020B0604030504040204" pitchFamily="34" charset="-120"/>
                 <a:ea typeface="Microsoft JhengHei" panose="020B0604030504040204" pitchFamily="34" charset="-120"/>
               </a:rPr>
-              <a:t>在急難詩  我更需要耶穌</a:t>
+              <a:t>在</a:t>
+            </a:r>
+            <a:r>
+              <a:rPr lang="zh-CN" altLang="en-US" sz="6400" b="1" smtClean="0">
+                <a:solidFill>
+                  <a:srgbClr val="660033"/>
+                </a:solidFill>
+                <a:latin typeface="Microsoft JhengHei" panose="020B0604030504040204" pitchFamily="34" charset="-120"/>
+                <a:ea typeface="Microsoft JhengHei" panose="020B0604030504040204" pitchFamily="34" charset="-120"/>
+              </a:rPr>
+              <a:t>急難時  </a:t>
+            </a:r>
+            <a:r>
+              <a:rPr lang="zh-CN" altLang="en-US" sz="6400" b="1" dirty="0">
+                <a:solidFill>
+                  <a:srgbClr val="660033"/>
+                </a:solidFill>
+                <a:latin typeface="Microsoft JhengHei" panose="020B0604030504040204" pitchFamily="34" charset="-120"/>
+                <a:ea typeface="Microsoft JhengHei" panose="020B0604030504040204" pitchFamily="34" charset="-120"/>
+              </a:rPr>
+              <a:t>我更需要耶穌</a:t>
             </a:r>
             <a:endParaRPr lang="en-US" altLang="zh-CN" sz="6400" b="1" dirty="0">
               <a:solidFill>
@@ -3517,7 +3578,7 @@
     </p:spTree>
     <p:extLst>
       <p:ext uri="{BB962C8B-B14F-4D97-AF65-F5344CB8AC3E}">
-        <p14:creationId xmlns:p14="http://schemas.microsoft.com/office/powerpoint/2010/main" val="1898851473"/>
+        <p14:creationId xmlns:p14="http://schemas.microsoft.com/office/powerpoint/2010/main" xmlns="" val="1898851473"/>
       </p:ext>
     </p:extLst>
   </p:cSld>
@@ -3614,7 +3675,7 @@
     </p:spTree>
     <p:extLst>
       <p:ext uri="{BB962C8B-B14F-4D97-AF65-F5344CB8AC3E}">
-        <p14:creationId xmlns:p14="http://schemas.microsoft.com/office/powerpoint/2010/main" val="823870616"/>
+        <p14:creationId xmlns:p14="http://schemas.microsoft.com/office/powerpoint/2010/main" xmlns="" val="823870616"/>
       </p:ext>
     </p:extLst>
   </p:cSld>
@@ -3711,7 +3772,7 @@
     </p:spTree>
     <p:extLst>
       <p:ext uri="{BB962C8B-B14F-4D97-AF65-F5344CB8AC3E}">
-        <p14:creationId xmlns:p14="http://schemas.microsoft.com/office/powerpoint/2010/main" val="1924442542"/>
+        <p14:creationId xmlns:p14="http://schemas.microsoft.com/office/powerpoint/2010/main" xmlns="" val="1924442542"/>
       </p:ext>
     </p:extLst>
   </p:cSld>
@@ -3847,7 +3908,7 @@
     </p:spTree>
     <p:extLst>
       <p:ext uri="{BB962C8B-B14F-4D97-AF65-F5344CB8AC3E}">
-        <p14:creationId xmlns:p14="http://schemas.microsoft.com/office/powerpoint/2010/main" val="1437260504"/>
+        <p14:creationId xmlns:p14="http://schemas.microsoft.com/office/powerpoint/2010/main" xmlns="" val="1437260504"/>
       </p:ext>
     </p:extLst>
   </p:cSld>
@@ -3983,7 +4044,7 @@
     </p:spTree>
     <p:extLst>
       <p:ext uri="{BB962C8B-B14F-4D97-AF65-F5344CB8AC3E}">
-        <p14:creationId xmlns:p14="http://schemas.microsoft.com/office/powerpoint/2010/main" val="2787873497"/>
+        <p14:creationId xmlns:p14="http://schemas.microsoft.com/office/powerpoint/2010/main" xmlns="" val="2787873497"/>
       </p:ext>
     </p:extLst>
   </p:cSld>
@@ -4080,7 +4141,7 @@
     </p:spTree>
     <p:extLst>
       <p:ext uri="{BB962C8B-B14F-4D97-AF65-F5344CB8AC3E}">
-        <p14:creationId xmlns:p14="http://schemas.microsoft.com/office/powerpoint/2010/main" val="223549679"/>
+        <p14:creationId xmlns:p14="http://schemas.microsoft.com/office/powerpoint/2010/main" xmlns="" val="223549679"/>
       </p:ext>
     </p:extLst>
   </p:cSld>
@@ -4177,7 +4238,7 @@
     </p:spTree>
     <p:extLst>
       <p:ext uri="{BB962C8B-B14F-4D97-AF65-F5344CB8AC3E}">
-        <p14:creationId xmlns:p14="http://schemas.microsoft.com/office/powerpoint/2010/main" val="809796801"/>
+        <p14:creationId xmlns:p14="http://schemas.microsoft.com/office/powerpoint/2010/main" xmlns="" val="809796801"/>
       </p:ext>
     </p:extLst>
   </p:cSld>
@@ -4313,7 +4374,7 @@
     </p:spTree>
     <p:extLst>
       <p:ext uri="{BB962C8B-B14F-4D97-AF65-F5344CB8AC3E}">
-        <p14:creationId xmlns:p14="http://schemas.microsoft.com/office/powerpoint/2010/main" val="4198946025"/>
+        <p14:creationId xmlns:p14="http://schemas.microsoft.com/office/powerpoint/2010/main" xmlns="" val="4198946025"/>
       </p:ext>
     </p:extLst>
   </p:cSld>
@@ -4449,7 +4510,7 @@
     </p:spTree>
     <p:extLst>
       <p:ext uri="{BB962C8B-B14F-4D97-AF65-F5344CB8AC3E}">
-        <p14:creationId xmlns:p14="http://schemas.microsoft.com/office/powerpoint/2010/main" val="252186525"/>
+        <p14:creationId xmlns:p14="http://schemas.microsoft.com/office/powerpoint/2010/main" xmlns="" val="252186525"/>
       </p:ext>
     </p:extLst>
   </p:cSld>
@@ -4546,7 +4607,7 @@
     </p:spTree>
     <p:extLst>
       <p:ext uri="{BB962C8B-B14F-4D97-AF65-F5344CB8AC3E}">
-        <p14:creationId xmlns:p14="http://schemas.microsoft.com/office/powerpoint/2010/main" val="1124183489"/>
+        <p14:creationId xmlns:p14="http://schemas.microsoft.com/office/powerpoint/2010/main" xmlns="" val="1124183489"/>
       </p:ext>
     </p:extLst>
   </p:cSld>
@@ -4643,7 +4704,7 @@
     </p:spTree>
     <p:extLst>
       <p:ext uri="{BB962C8B-B14F-4D97-AF65-F5344CB8AC3E}">
-        <p14:creationId xmlns:p14="http://schemas.microsoft.com/office/powerpoint/2010/main" val="338801931"/>
+        <p14:creationId xmlns:p14="http://schemas.microsoft.com/office/powerpoint/2010/main" xmlns="" val="338801931"/>
       </p:ext>
     </p:extLst>
   </p:cSld>
@@ -4935,7 +4996,7 @@
   <a:extraClrSchemeLst/>
   <a:extLst>
     <a:ext uri="{05A4C25C-085E-4340-85A3-A5531E510DB2}">
-      <thm15:themeFamily xmlns:thm15="http://schemas.microsoft.com/office/thememl/2012/main" name="Theme1" id="{AFC7C034-021A-479F-A5B0-F4AE2AC2A6F8}" vid="{E4B01A5C-7C0B-4AB8-8973-047186F18E30}"/>
+      <thm15:themeFamily xmlns:thm15="http://schemas.microsoft.com/office/thememl/2012/main" xmlns="" name="Theme1" id="{AFC7C034-021A-479F-A5B0-F4AE2AC2A6F8}" vid="{E4B01A5C-7C0B-4AB8-8973-047186F18E30}"/>
     </a:ext>
   </a:extLst>
 </a:theme>
